--- a/docs/deck/CareQueue_Team12_Demo_Deck.pptx
+++ b/docs/deck/CareQueue_Team12_Demo_Deck.pptx
@@ -638,7 +638,7 @@
           <a:lstStyle/>
           <a:p>
             <a:r>
-              <a:t>About 20 seconds. We built our three PRD Must-Haves: ordered digital tokens, Call Next with a live Now-Serving display, and a wait estimate that learns from real service times. The display updates in under 2 seconds; we measured 28 ms, and 37 automated tests pass. We cut a server and database, QR phone tracking and Send to Billing on purpose, to finish a working demo in 1.5 days.</a:t>
+              <a:t>About 20 seconds. We built our three PRD Must-Haves: ordered digital tokens, Call Next with a live Now-Serving display, and a wait estimate that learns from real service times. The display updates in under 2 seconds; we measured 28 ms, and 37 automated tests pass. We cut a server and database, QR phone tracking and voice announcements on purpose, to finish a working demo in 1.5 days. We also added Send to Billing, so a patient moves from their department straight into the Billing queue.</a:t>
             </a:r>
           </a:p>
         </p:txBody>
@@ -724,7 +724,7 @@
           <a:lstStyle/>
           <a:p>
             <a:r>
-              <a:t>About two minutes. Ashik drives, Sam narrates. 1) Sign in as a patient and get a token. 2) Sign out, sign in as receptionist with PIN 1234, press Call Next. 3) Open the display: the token is now serving, the next tokens show their wait. 4) Skip and Recall. Note: one browser holds one sign-in at a time. If the live app fails, play CareQueue-backup-demo.webm (in docs/demo of our repo) straight away.</a:t>
+              <a:t>About two minutes. Ashik drives, Sam narrates. 1) Sign in as a patient and get a token. 2) Sign out, sign in as receptionist with PIN 1234, press Call Next. 3) Open the display: the token is now serving, the next tokens show their wait. 4) Skip and Recall. 5) Send a served patient to Billing and show the new B token on the display. Note: one browser holds one sign-in at a time. If the live app fails, play CareQueue-backup-demo.webm (in docs/demo of our repo) straight away.</a:t>
             </a:r>
           </a:p>
         </p:txBody>
@@ -4024,7 +4024,7 @@
                 <a:ea typeface="Arial" pitchFamily="34" charset="-122"/>
                 <a:cs typeface="Arial" pitchFamily="34" charset="-120"/>
               </a:rPr>
-              <a:t>Send to Billing — one queue per department is clearer</a:t>
+              <a:t>Voice announcement — the large display carries the call</a:t>
             </a:r>
             <a:endParaRPr lang="en-US" sz="1400" dirty="0"/>
           </a:p>

--- a/docs/deck/CareQueue_Team12_Demo_Deck.pptx
+++ b/docs/deck/CareQueue_Team12_Demo_Deck.pptx
@@ -638,7 +638,7 @@
           <a:lstStyle/>
           <a:p>
             <a:r>
-              <a:t>About 20 seconds. We built our three PRD Must-Haves: ordered digital tokens, Call Next with a live Now-Serving display, and a wait estimate that learns from real service times. The display updates in under 2 seconds; across 10 calls we measured at most 0.7 seconds, and 60 automated tests pass. We cut multiple counters, QR phone tracking and voice announcements on purpose, to finish a working demo in 1.5 days. The queue runs on a Flask server with an SQLite database. We also added Send to Billing, so a patient moves from their department straight into the Billing queue.</a:t>
+              <a:t>About 20 seconds. We built our three PRD Must-Haves: ordered digital tokens, Call Next with a live Now-Serving display, and a wait estimate that learns from real service times. The display updates in under 2 seconds; across 10 calls we measured at most 0.7 seconds, and 60 automated tests pass. We cut multiple counters, QR phone tracking and online booking on purpose, to finish a working demo in 1.5 days. The queue runs on a Flask server with an SQLite database. We also added Send to Billing, so a patient moves from their department straight into the Billing queue.</a:t>
             </a:r>
           </a:p>
         </p:txBody>
@@ -724,7 +724,7 @@
           <a:lstStyle/>
           <a:p>
             <a:r>
-              <a:t>About two minutes. Ashik drives, Sam narrates. 1) Sign in as a patient and get a token. 2) Sign out, sign in as receptionist with PIN 1234, press Call Next. 3) Open the display: the token is now serving, the next tokens show their wait. 4) Skip and Recall. 5) Send a served patient to Billing and show the new B token on the display. Start the app first with npm start and open http://127.0.0.1:8000. Note: one browser holds one sign-in at a time. If the live app fails, play CareQueue-backup-demo.webm (in docs/demo of our repo) straight away.</a:t>
+              <a:t>About two minutes. Ashik drives, Sam narrates. 1) Sign in as a patient and get a token. 2) Sign out, sign in as receptionist with PIN 1234, press Call Next. 3) Open the display: the token is now serving, the next tokens show their wait. 4) Skip and Recall. 5) Send a served patient to Billing and show the new B token on the display. 6) Press Turn on sound on the display, then Call Next: it chimes and says the token and department. Start the app first with npm start and open http://127.0.0.1:8000. Note: one browser holds one sign-in at a time. If the live app fails, play CareQueue-backup-demo.webm (in docs/demo of our repo) straight away.</a:t>
             </a:r>
           </a:p>
         </p:txBody>
@@ -4024,7 +4024,7 @@
                 <a:ea typeface="Arial" pitchFamily="34" charset="-122"/>
                 <a:cs typeface="Arial" pitchFamily="34" charset="-120"/>
               </a:rPr>
-              <a:t>Voice announcement — the large display carries the call</a:t>
+              <a:t>Online booking from home — walk-in patients come first</a:t>
             </a:r>
             <a:endParaRPr lang="en-US" sz="1400" dirty="0"/>
           </a:p>

--- a/docs/deck/CareQueue_Team12_Demo_Deck.pptx
+++ b/docs/deck/CareQueue_Team12_Demo_Deck.pptx
@@ -3980,7 +3980,7 @@
                 <a:ea typeface="Arial" pitchFamily="34" charset="-122"/>
                 <a:cs typeface="Arial" pitchFamily="34" charset="-120"/>
               </a:rPr>
-              <a:t>QR phone tracking — the display and slip cover it</a:t>
+              <a:t>Secure staff login — demo PIN is checked in the browser only</a:t>
             </a:r>
             <a:endParaRPr lang="en-US" sz="1400" dirty="0"/>
           </a:p>

--- a/docs/deck/CareQueue_Team12_Demo_Deck.pptx
+++ b/docs/deck/CareQueue_Team12_Demo_Deck.pptx
@@ -3936,7 +3936,7 @@
                 <a:ea typeface="Arial" pitchFamily="34" charset="-122"/>
                 <a:cs typeface="Arial" pitchFamily="34" charset="-120"/>
               </a:rPr>
-              <a:t>Multiple counters — one counter per queue for the demo</a:t>
+              <a:t>Reports for past days — today’s figures only</a:t>
             </a:r>
             <a:endParaRPr lang="en-US" sz="1400" dirty="0"/>
           </a:p>
